--- a/dist/초3/국어/문학과매체/초3_국어_문학과매체_01_인물의마음과까닭.pptx
+++ b/dist/초3/국어/문학과매체/초3_국어_문학과매체_01_인물의마음과까닭.pptx
@@ -119,13 +119,13 @@
   <p:extLst>
     <p:ext uri="{521415D9-36F7-43E2-AB2F-B90AF26B5E84}">
       <p14:sectionLst xmlns:p14="http://schemas.microsoft.com/office/powerpoint/2010/main">
-        <p14:section name="도입" id="{14a56634-aaa6-86b5-dc13-d3cf615043be}">
+        <p14:section name="도입" id="{1e274e94-daf7-12ef-b197-ad053b452fe8}">
           <p14:sldIdLst>
             <p14:sldId id="256"/>
             <p14:sldId id="257"/>
           </p14:sldIdLst>
         </p14:section>
-        <p14:section name="개념" id="{0d863086-a358-9a8f-c498-8e71cf207af8}">
+        <p14:section name="개념" id="{df2ef6ab-1e02-5ba8-8dd2-53701f5c460a}">
           <p14:sldIdLst>
             <p14:sldId id="258"/>
             <p14:sldId id="259"/>
@@ -133,25 +133,25 @@
             <p14:sldId id="261"/>
           </p14:sldIdLst>
         </p14:section>
-        <p14:section name="연습" id="{ca1609a6-5165-8af1-bdd5-1f3ce3d1d35e}">
+        <p14:section name="연습" id="{713f5f43-5c95-08bb-b81b-67d93c02e570}">
           <p14:sldIdLst>
             <p14:sldId id="262"/>
             <p14:sldId id="263"/>
           </p14:sldIdLst>
         </p14:section>
-        <p14:section name="확인" id="{0ac4af28-a659-c084-1f8f-d4ddc0bb7188}">
+        <p14:section name="확인" id="{b1ef6408-98e8-289b-9b37-6d2d6ca351d8}">
           <p14:sldIdLst>
             <p14:sldId id="264"/>
             <p14:sldId id="265"/>
             <p14:sldId id="266"/>
           </p14:sldIdLst>
         </p14:section>
-        <p14:section name="정리" id="{7660f2af-54ae-ca5c-1fd3-4c95a6085035}">
+        <p14:section name="정리" id="{ebdb8a2a-a0b1-108d-80db-687d0001bea8}">
           <p14:sldIdLst>
             <p14:sldId id="267"/>
           </p14:sldIdLst>
         </p14:section>
-        <p14:section name="보충" id="{bcbfbcf7-baf1-b3b8-4439-8dba56950e89}">
+        <p14:section name="보충" id="{96cab223-a589-eea9-b13b-2bf55955da92}">
           <p14:sldIdLst>
             <p14:sldId id="268"/>
           </p14:sldIdLst>
@@ -2853,7 +2853,7 @@
           <a:bodyPr wrap="square" lIns="0" tIns="0" rIns="0" bIns="0" rtlCol="0" anchor="ctr"/>
           <a:lstStyle/>
           <a:p>
-            <a:pPr algn="l" indent="0" marL="0">
+            <a:pPr eaLnBrk="0" algn="l" indent="0" marL="0">
               <a:buNone/>
             </a:pPr>
             <a:r>
@@ -2894,7 +2894,7 @@
           <a:bodyPr wrap="square" lIns="0" tIns="0" rIns="0" bIns="0" rtlCol="0" anchor="t"/>
           <a:lstStyle/>
           <a:p>
-            <a:pPr indent="0" marL="0">
+            <a:pPr eaLnBrk="0" indent="0" marL="0">
               <a:buNone/>
             </a:pPr>
             <a:r>
@@ -2960,7 +2960,7 @@
           <a:bodyPr wrap="square" lIns="0" tIns="0" rIns="0" bIns="0" rtlCol="0" anchor="ctr"/>
           <a:lstStyle/>
           <a:p>
-            <a:pPr indent="0" marL="0">
+            <a:pPr eaLnBrk="0" indent="0" marL="0">
               <a:spcAft>
                 <a:spcPts val="600"/>
               </a:spcAft>
@@ -2980,7 +2980,7 @@
             <a:endParaRPr lang="ko-KR" sz="3000" dirty="0"/>
           </a:p>
           <a:p>
-            <a:pPr indent="0" marL="0">
+            <a:pPr eaLnBrk="0" indent="0" marL="0">
               <a:spcAft>
                 <a:spcPts val="600"/>
               </a:spcAft>
@@ -3000,7 +3000,7 @@
             <a:endParaRPr lang="ko-KR" sz="3000" dirty="0"/>
           </a:p>
           <a:p>
-            <a:pPr indent="0" marL="0">
+            <a:pPr eaLnBrk="0" indent="0" marL="0">
               <a:spcAft>
                 <a:spcPts val="600"/>
               </a:spcAft>
@@ -3069,7 +3069,7 @@
           <a:bodyPr wrap="square" lIns="0" tIns="0" rIns="0" bIns="0" rtlCol="0" anchor="ctr"/>
           <a:lstStyle/>
           <a:p>
-            <a:pPr algn="l" indent="0" marL="0">
+            <a:pPr eaLnBrk="0" algn="l" indent="0" marL="0">
               <a:buNone/>
             </a:pPr>
             <a:r>
@@ -3135,7 +3135,7 @@
           <a:bodyPr wrap="square" lIns="0" tIns="0" rIns="0" bIns="0" rtlCol="0" anchor="ctr"/>
           <a:lstStyle/>
           <a:p>
-            <a:pPr indent="0" marL="0">
+            <a:pPr eaLnBrk="0" indent="0" marL="0">
               <a:spcAft>
                 <a:spcPts val="600"/>
               </a:spcAft>
@@ -3185,7 +3185,7 @@
           <a:bodyPr wrap="square" lIns="177800" tIns="0" rIns="177800" bIns="0" rtlCol="0" anchor="ctr"/>
           <a:lstStyle/>
           <a:p>
-            <a:pPr algn="l" indent="0" marL="0">
+            <a:pPr eaLnBrk="0" algn="l" indent="0" marL="0">
               <a:buNone/>
             </a:pPr>
             <a:r>
@@ -3224,7 +3224,7 @@
           <a:bodyPr wrap="square" lIns="0" tIns="0" rIns="0" bIns="0" rtlCol="0" anchor="ctr"/>
           <a:lstStyle/>
           <a:p>
-            <a:pPr algn="l" indent="0" marL="0">
+            <a:pPr eaLnBrk="0" algn="l" indent="0" marL="0">
               <a:buNone/>
             </a:pPr>
             <a:r>
@@ -3241,7 +3241,7 @@
             <a:endParaRPr lang="ko-KR" sz="3000" dirty="0"/>
           </a:p>
           <a:p>
-            <a:pPr algn="l" indent="0" marL="0">
+            <a:pPr eaLnBrk="0" algn="l" indent="0" marL="0">
               <a:buNone/>
             </a:pPr>
             <a:r>
@@ -3280,7 +3280,7 @@
           <a:bodyPr wrap="square" lIns="0" tIns="0" rIns="0" bIns="0" rtlCol="0" anchor="ctr"/>
           <a:lstStyle/>
           <a:p>
-            <a:pPr algn="l" indent="0" marL="0">
+            <a:pPr eaLnBrk="0" algn="l" indent="0" marL="0">
               <a:buNone/>
             </a:pPr>
             <a:r>
@@ -3327,7 +3327,7 @@
           <a:bodyPr wrap="square" lIns="177800" tIns="0" rIns="177800" bIns="0" rtlCol="0" anchor="ctr"/>
           <a:lstStyle/>
           <a:p>
-            <a:pPr algn="l" indent="0" marL="0">
+            <a:pPr eaLnBrk="0" algn="l" indent="0" marL="0">
               <a:buNone/>
             </a:pPr>
             <a:r>
@@ -3366,7 +3366,7 @@
           <a:bodyPr wrap="square" lIns="0" tIns="0" rIns="0" bIns="0" rtlCol="0" anchor="ctr"/>
           <a:lstStyle/>
           <a:p>
-            <a:pPr algn="l" indent="0" marL="0">
+            <a:pPr eaLnBrk="0" algn="l" indent="0" marL="0">
               <a:buNone/>
             </a:pPr>
             <a:r>
@@ -3405,7 +3405,7 @@
           <a:bodyPr wrap="square" lIns="0" tIns="0" rIns="0" bIns="0" rtlCol="0" anchor="ctr"/>
           <a:lstStyle/>
           <a:p>
-            <a:pPr algn="l" indent="0" marL="0">
+            <a:pPr eaLnBrk="0" algn="l" indent="0" marL="0">
               <a:buNone/>
             </a:pPr>
             <a:r>
@@ -3444,7 +3444,7 @@
           <a:bodyPr wrap="square" lIns="0" tIns="0" rIns="0" bIns="0" rtlCol="0" anchor="ctr"/>
           <a:lstStyle/>
           <a:p>
-            <a:pPr algn="l" indent="0" marL="0">
+            <a:pPr eaLnBrk="0" algn="l" indent="0" marL="0">
               <a:buNone/>
             </a:pPr>
             <a:r>
@@ -3483,7 +3483,7 @@
           <a:bodyPr wrap="square" lIns="0" tIns="0" rIns="0" bIns="0" rtlCol="0" anchor="ctr"/>
           <a:lstStyle/>
           <a:p>
-            <a:pPr algn="l" indent="0" marL="0">
+            <a:pPr eaLnBrk="0" algn="l" indent="0" marL="0">
               <a:buNone/>
             </a:pPr>
             <a:r>
@@ -3540,7 +3540,7 @@
             </a:lvl1pPr>
           </a:lstStyle>
           <a:p>
-            <a:pPr algn="r"/>
+            <a:pPr eaLnBrk="0" algn="r"/>
             <a:fld id="{F7021451-1387-4CA6-816F-3879F97B5CBC}" type="slidenum">
               <a:rPr b="0" lang="en-US"/>
               <a:t>10</a:t>
@@ -3597,7 +3597,7 @@
           <a:bodyPr wrap="square" lIns="0" tIns="0" rIns="0" bIns="0" rtlCol="0" anchor="ctr"/>
           <a:lstStyle/>
           <a:p>
-            <a:pPr algn="l" indent="0" marL="0">
+            <a:pPr eaLnBrk="0" algn="l" indent="0" marL="0">
               <a:buNone/>
             </a:pPr>
             <a:r>
@@ -3636,7 +3636,7 @@
           <a:bodyPr wrap="square" lIns="0" tIns="0" rIns="0" bIns="0" rtlCol="0" anchor="ctr"/>
           <a:lstStyle/>
           <a:p>
-            <a:pPr algn="l" indent="0" marL="0">
+            <a:pPr eaLnBrk="0" algn="l" indent="0" marL="0">
               <a:buNone/>
             </a:pPr>
             <a:r>
@@ -3702,7 +3702,7 @@
           <a:bodyPr wrap="square" lIns="0" tIns="0" rIns="0" bIns="0" rtlCol="0" anchor="ctr"/>
           <a:lstStyle/>
           <a:p>
-            <a:pPr indent="0" marL="0">
+            <a:pPr eaLnBrk="0" indent="0" marL="0">
               <a:spcAft>
                 <a:spcPts val="600"/>
               </a:spcAft>
@@ -3752,7 +3752,7 @@
           <a:bodyPr wrap="square" lIns="0" tIns="0" rIns="0" bIns="0" rtlCol="0" anchor="ctr"/>
           <a:lstStyle/>
           <a:p>
-            <a:pPr algn="ctr" indent="0" marL="0">
+            <a:pPr eaLnBrk="0" algn="ctr" indent="0" marL="0">
               <a:buNone/>
             </a:pPr>
             <a:r>
@@ -3818,7 +3818,7 @@
           <a:bodyPr wrap="square" lIns="0" tIns="0" rIns="0" bIns="0" rtlCol="0" anchor="ctr"/>
           <a:lstStyle/>
           <a:p>
-            <a:pPr indent="0" marL="0">
+            <a:pPr eaLnBrk="0" indent="0" marL="0">
               <a:spcAft>
                 <a:spcPts val="600"/>
               </a:spcAft>
@@ -3838,7 +3838,7 @@
             <a:endParaRPr lang="ko-KR" sz="3000" dirty="0"/>
           </a:p>
           <a:p>
-            <a:pPr indent="0" marL="0">
+            <a:pPr eaLnBrk="0" indent="0" marL="0">
               <a:spcAft>
                 <a:spcPts val="600"/>
               </a:spcAft>
@@ -3888,7 +3888,7 @@
           <a:bodyPr wrap="square" lIns="0" tIns="0" rIns="0" bIns="0" rtlCol="0" anchor="ctr"/>
           <a:lstStyle/>
           <a:p>
-            <a:pPr algn="ctr" indent="0" marL="0">
+            <a:pPr eaLnBrk="0" algn="ctr" indent="0" marL="0">
               <a:buNone/>
             </a:pPr>
             <a:r>
@@ -3954,7 +3954,7 @@
           <a:bodyPr wrap="square" lIns="0" tIns="0" rIns="0" bIns="0" rtlCol="0" anchor="ctr"/>
           <a:lstStyle/>
           <a:p>
-            <a:pPr indent="0" marL="0">
+            <a:pPr eaLnBrk="0" indent="0" marL="0">
               <a:spcAft>
                 <a:spcPts val="600"/>
               </a:spcAft>
@@ -3974,7 +3974,7 @@
             <a:endParaRPr lang="ko-KR" sz="3000" dirty="0"/>
           </a:p>
           <a:p>
-            <a:pPr indent="0" marL="0">
+            <a:pPr eaLnBrk="0" indent="0" marL="0">
               <a:spcAft>
                 <a:spcPts val="600"/>
               </a:spcAft>
@@ -4024,7 +4024,7 @@
           <a:bodyPr wrap="square" lIns="0" tIns="0" rIns="0" bIns="0" rtlCol="0" anchor="ctr"/>
           <a:lstStyle/>
           <a:p>
-            <a:pPr algn="ctr" indent="0" marL="0">
+            <a:pPr eaLnBrk="0" algn="ctr" indent="0" marL="0">
               <a:buNone/>
             </a:pPr>
             <a:r>
@@ -4090,7 +4090,7 @@
           <a:bodyPr wrap="square" lIns="0" tIns="0" rIns="0" bIns="0" rtlCol="0" anchor="ctr"/>
           <a:lstStyle/>
           <a:p>
-            <a:pPr indent="0" marL="0">
+            <a:pPr eaLnBrk="0" indent="0" marL="0">
               <a:spcAft>
                 <a:spcPts val="600"/>
               </a:spcAft>
@@ -4110,7 +4110,7 @@
             <a:endParaRPr lang="ko-KR" sz="3000" dirty="0"/>
           </a:p>
           <a:p>
-            <a:pPr indent="0" marL="0">
+            <a:pPr eaLnBrk="0" indent="0" marL="0">
               <a:spcAft>
                 <a:spcPts val="600"/>
               </a:spcAft>
@@ -4170,7 +4170,7 @@
             </a:lvl1pPr>
           </a:lstStyle>
           <a:p>
-            <a:pPr algn="r"/>
+            <a:pPr eaLnBrk="0" algn="r"/>
             <a:fld id="{F7021451-1387-4CA6-816F-3879F97B5CBC}" type="slidenum">
               <a:rPr b="0" lang="en-US"/>
               <a:t>11</a:t>
@@ -4227,7 +4227,7 @@
           <a:bodyPr wrap="square" lIns="0" tIns="0" rIns="0" bIns="0" rtlCol="0" anchor="ctr"/>
           <a:lstStyle/>
           <a:p>
-            <a:pPr algn="l" indent="0" marL="0">
+            <a:pPr eaLnBrk="0" algn="l" indent="0" marL="0">
               <a:buNone/>
             </a:pPr>
             <a:r>
@@ -4293,7 +4293,7 @@
           <a:bodyPr wrap="square" lIns="0" tIns="0" rIns="0" bIns="0" rtlCol="0" anchor="ctr"/>
           <a:lstStyle/>
           <a:p>
-            <a:pPr indent="0" marL="0">
+            <a:pPr eaLnBrk="0" indent="0" marL="0">
               <a:spcAft>
                 <a:spcPts val="600"/>
               </a:spcAft>
@@ -4313,7 +4313,7 @@
             <a:endParaRPr lang="ko-KR" sz="3000" dirty="0"/>
           </a:p>
           <a:p>
-            <a:pPr indent="0" marL="0">
+            <a:pPr eaLnBrk="0" indent="0" marL="0">
               <a:spcAft>
                 <a:spcPts val="600"/>
               </a:spcAft>
@@ -4363,7 +4363,7 @@
           <a:bodyPr wrap="square" lIns="177800" tIns="0" rIns="177800" bIns="0" rtlCol="0" anchor="ctr"/>
           <a:lstStyle/>
           <a:p>
-            <a:pPr algn="l" indent="0" marL="0">
+            <a:pPr eaLnBrk="0" algn="l" indent="0" marL="0">
               <a:buNone/>
             </a:pPr>
             <a:r>
@@ -4410,7 +4410,7 @@
           <a:bodyPr wrap="square" lIns="177800" tIns="0" rIns="177800" bIns="0" rtlCol="0" anchor="ctr"/>
           <a:lstStyle/>
           <a:p>
-            <a:pPr algn="l" indent="0" marL="0">
+            <a:pPr eaLnBrk="0" algn="l" indent="0" marL="0">
               <a:buNone/>
             </a:pPr>
             <a:r>
@@ -4449,7 +4449,7 @@
           <a:bodyPr wrap="square" lIns="0" tIns="0" rIns="0" bIns="0" rtlCol="0" anchor="t"/>
           <a:lstStyle/>
           <a:p>
-            <a:pPr algn="l" indent="0" marL="0">
+            <a:pPr eaLnBrk="0" algn="l" indent="0" marL="0">
               <a:buNone/>
             </a:pPr>
             <a:r>
@@ -4488,7 +4488,7 @@
           <a:bodyPr wrap="square" lIns="0" tIns="0" rIns="0" bIns="0" rtlCol="0" anchor="ctr"/>
           <a:lstStyle/>
           <a:p>
-            <a:pPr algn="l" indent="0" marL="0">
+            <a:pPr eaLnBrk="0" algn="l" indent="0" marL="0">
               <a:buNone/>
             </a:pPr>
             <a:r>
@@ -4527,7 +4527,7 @@
           <a:bodyPr wrap="square" lIns="0" tIns="0" rIns="0" bIns="0" rtlCol="0" anchor="ctr"/>
           <a:lstStyle/>
           <a:p>
-            <a:pPr algn="l" indent="0" marL="0">
+            <a:pPr eaLnBrk="0" algn="l" indent="0" marL="0">
               <a:buNone/>
             </a:pPr>
             <a:r>
@@ -4566,7 +4566,7 @@
           <a:bodyPr wrap="square" lIns="0" tIns="0" rIns="0" bIns="0" rtlCol="0" anchor="ctr"/>
           <a:lstStyle/>
           <a:p>
-            <a:pPr algn="l" indent="0" marL="0">
+            <a:pPr eaLnBrk="0" algn="l" indent="0" marL="0">
               <a:buNone/>
             </a:pPr>
             <a:r>
@@ -4605,7 +4605,7 @@
           <a:bodyPr wrap="square" lIns="0" tIns="0" rIns="0" bIns="0" rtlCol="0" anchor="ctr"/>
           <a:lstStyle/>
           <a:p>
-            <a:pPr algn="l" indent="0" marL="0">
+            <a:pPr eaLnBrk="0" algn="l" indent="0" marL="0">
               <a:buNone/>
             </a:pPr>
             <a:r>
@@ -4662,7 +4662,7 @@
             </a:lvl1pPr>
           </a:lstStyle>
           <a:p>
-            <a:pPr algn="r"/>
+            <a:pPr eaLnBrk="0" algn="r"/>
             <a:fld id="{F7021451-1387-4CA6-816F-3879F97B5CBC}" type="slidenum">
               <a:rPr b="0" lang="en-US"/>
               <a:t>12</a:t>
@@ -4719,7 +4719,7 @@
           <a:bodyPr wrap="square" lIns="0" tIns="0" rIns="0" bIns="0" rtlCol="0" anchor="ctr"/>
           <a:lstStyle/>
           <a:p>
-            <a:pPr algn="l" indent="0" marL="0">
+            <a:pPr eaLnBrk="0" algn="l" indent="0" marL="0">
               <a:buNone/>
             </a:pPr>
             <a:r>
@@ -4758,7 +4758,7 @@
           <a:bodyPr wrap="square" lIns="0" tIns="0" rIns="0" bIns="0" rtlCol="0" anchor="ctr"/>
           <a:lstStyle/>
           <a:p>
-            <a:pPr algn="l" indent="0" marL="0">
+            <a:pPr eaLnBrk="0" algn="l" indent="0" marL="0">
               <a:buNone/>
             </a:pPr>
             <a:r>
@@ -4824,7 +4824,7 @@
           <a:bodyPr wrap="square" lIns="0" tIns="0" rIns="0" bIns="0" rtlCol="0" anchor="ctr"/>
           <a:lstStyle/>
           <a:p>
-            <a:pPr indent="0" marL="0">
+            <a:pPr eaLnBrk="0" indent="0" marL="0">
               <a:spcAft>
                 <a:spcPts val="600"/>
               </a:spcAft>
@@ -4874,7 +4874,7 @@
           <a:bodyPr wrap="square" lIns="76200" tIns="50800" rIns="76200" bIns="50800" rtlCol="0" anchor="ctr"/>
           <a:lstStyle/>
           <a:p>
-            <a:pPr algn="ctr" indent="0" marL="0">
+            <a:pPr eaLnBrk="0" algn="ctr" indent="0" marL="0">
               <a:buNone/>
             </a:pPr>
             <a:r>
@@ -4921,7 +4921,7 @@
           <a:bodyPr wrap="square" lIns="76200" tIns="50800" rIns="76200" bIns="50800" rtlCol="0" anchor="ctr"/>
           <a:lstStyle/>
           <a:p>
-            <a:pPr algn="ctr" indent="0" marL="0">
+            <a:pPr eaLnBrk="0" algn="ctr" indent="0" marL="0">
               <a:buNone/>
             </a:pPr>
             <a:r>
@@ -4968,7 +4968,7 @@
           <a:bodyPr wrap="square" lIns="76200" tIns="50800" rIns="76200" bIns="50800" rtlCol="0" anchor="ctr"/>
           <a:lstStyle/>
           <a:p>
-            <a:pPr algn="ctr" indent="0" marL="0">
+            <a:pPr eaLnBrk="0" algn="ctr" indent="0" marL="0">
               <a:buNone/>
             </a:pPr>
             <a:r>
@@ -5015,7 +5015,7 @@
           <a:bodyPr wrap="square" lIns="76200" tIns="50800" rIns="76200" bIns="50800" rtlCol="0" anchor="ctr"/>
           <a:lstStyle/>
           <a:p>
-            <a:pPr algn="ctr" indent="0" marL="0">
+            <a:pPr eaLnBrk="0" algn="ctr" indent="0" marL="0">
               <a:buNone/>
             </a:pPr>
             <a:r>
@@ -5072,7 +5072,7 @@
             </a:lvl1pPr>
           </a:lstStyle>
           <a:p>
-            <a:pPr algn="r"/>
+            <a:pPr eaLnBrk="0" algn="r"/>
             <a:fld id="{F7021451-1387-4CA6-816F-3879F97B5CBC}" type="slidenum">
               <a:rPr b="0" lang="en-US"/>
               <a:t>13</a:t>
@@ -5129,7 +5129,7 @@
           <a:bodyPr wrap="square" lIns="0" tIns="0" rIns="0" bIns="0" rtlCol="0" anchor="ctr"/>
           <a:lstStyle/>
           <a:p>
-            <a:pPr algn="l" indent="0" marL="0">
+            <a:pPr eaLnBrk="0" algn="l" indent="0" marL="0">
               <a:buNone/>
             </a:pPr>
             <a:r>
@@ -5168,7 +5168,7 @@
           <a:bodyPr wrap="square" lIns="0" tIns="0" rIns="0" bIns="0" rtlCol="0" anchor="ctr"/>
           <a:lstStyle/>
           <a:p>
-            <a:pPr algn="l" indent="0" marL="0">
+            <a:pPr eaLnBrk="0" algn="l" indent="0" marL="0">
               <a:buNone/>
             </a:pPr>
             <a:r>
@@ -5215,7 +5215,7 @@
           <a:bodyPr wrap="square" lIns="0" tIns="0" rIns="0" bIns="0" rtlCol="0" anchor="ctr"/>
           <a:lstStyle/>
           <a:p>
-            <a:pPr algn="ctr" indent="0" marL="0">
+            <a:pPr eaLnBrk="0" algn="ctr" indent="0" marL="0">
               <a:buNone/>
             </a:pPr>
             <a:r>
@@ -5254,7 +5254,7 @@
           <a:bodyPr wrap="square" lIns="0" tIns="0" rIns="0" bIns="0" rtlCol="0" anchor="ctr"/>
           <a:lstStyle/>
           <a:p>
-            <a:pPr algn="l" indent="0" marL="0">
+            <a:pPr eaLnBrk="0" algn="l" indent="0" marL="0">
               <a:buNone/>
             </a:pPr>
             <a:r>
@@ -5301,7 +5301,7 @@
           <a:bodyPr wrap="square" lIns="0" tIns="0" rIns="0" bIns="0" rtlCol="0" anchor="ctr"/>
           <a:lstStyle/>
           <a:p>
-            <a:pPr algn="ctr" indent="0" marL="0">
+            <a:pPr eaLnBrk="0" algn="ctr" indent="0" marL="0">
               <a:buNone/>
             </a:pPr>
             <a:r>
@@ -5340,7 +5340,7 @@
           <a:bodyPr wrap="square" lIns="0" tIns="0" rIns="0" bIns="0" rtlCol="0" anchor="ctr"/>
           <a:lstStyle/>
           <a:p>
-            <a:pPr algn="l" indent="0" marL="0">
+            <a:pPr eaLnBrk="0" algn="l" indent="0" marL="0">
               <a:buNone/>
             </a:pPr>
             <a:r>
@@ -5397,7 +5397,7 @@
             </a:lvl1pPr>
           </a:lstStyle>
           <a:p>
-            <a:pPr algn="r"/>
+            <a:pPr eaLnBrk="0" algn="r"/>
             <a:fld id="{F7021451-1387-4CA6-816F-3879F97B5CBC}" type="slidenum">
               <a:rPr b="0" lang="en-US"/>
               <a:t>2</a:t>
@@ -5454,7 +5454,7 @@
           <a:bodyPr wrap="square" lIns="0" tIns="0" rIns="0" bIns="0" rtlCol="0" anchor="ctr"/>
           <a:lstStyle/>
           <a:p>
-            <a:pPr algn="l" indent="0" marL="0">
+            <a:pPr eaLnBrk="0" algn="l" indent="0" marL="0">
               <a:buNone/>
             </a:pPr>
             <a:r>
@@ -5520,7 +5520,7 @@
           <a:bodyPr wrap="square" lIns="0" tIns="0" rIns="0" bIns="0" rtlCol="0" anchor="ctr"/>
           <a:lstStyle/>
           <a:p>
-            <a:pPr indent="0" marL="0">
+            <a:pPr eaLnBrk="0" indent="0" marL="0">
               <a:spcAft>
                 <a:spcPts val="600"/>
               </a:spcAft>
@@ -5589,7 +5589,7 @@
           <a:bodyPr wrap="square" lIns="0" tIns="0" rIns="0" bIns="0" rtlCol="0" anchor="ctr"/>
           <a:lstStyle/>
           <a:p>
-            <a:pPr indent="0" marL="0">
+            <a:pPr eaLnBrk="0" indent="0" marL="0">
               <a:spcAft>
                 <a:spcPts val="600"/>
               </a:spcAft>
@@ -5609,7 +5609,7 @@
             <a:endParaRPr lang="ko-KR" sz="3000" dirty="0"/>
           </a:p>
           <a:p>
-            <a:pPr indent="0" marL="0">
+            <a:pPr eaLnBrk="0" indent="0" marL="0">
               <a:spcAft>
                 <a:spcPts val="600"/>
               </a:spcAft>
@@ -5678,7 +5678,7 @@
           <a:bodyPr wrap="square" lIns="0" tIns="0" rIns="0" bIns="0" rtlCol="0" anchor="ctr"/>
           <a:lstStyle/>
           <a:p>
-            <a:pPr indent="0" marL="0">
+            <a:pPr eaLnBrk="0" indent="0" marL="0">
               <a:spcAft>
                 <a:spcPts val="600"/>
               </a:spcAft>
@@ -5698,7 +5698,7 @@
             <a:endParaRPr lang="ko-KR" sz="3000" dirty="0"/>
           </a:p>
           <a:p>
-            <a:pPr indent="0" marL="0">
+            <a:pPr eaLnBrk="0" indent="0" marL="0">
               <a:spcAft>
                 <a:spcPts val="600"/>
               </a:spcAft>
@@ -5767,7 +5767,7 @@
           <a:bodyPr wrap="square" lIns="0" tIns="0" rIns="0" bIns="0" rtlCol="0" anchor="ctr"/>
           <a:lstStyle/>
           <a:p>
-            <a:pPr indent="0" marL="0">
+            <a:pPr eaLnBrk="0" indent="0" marL="0">
               <a:spcAft>
                 <a:spcPts val="600"/>
               </a:spcAft>
@@ -5787,7 +5787,7 @@
             <a:endParaRPr lang="ko-KR" sz="3000" dirty="0"/>
           </a:p>
           <a:p>
-            <a:pPr indent="0" marL="0">
+            <a:pPr eaLnBrk="0" indent="0" marL="0">
               <a:spcAft>
                 <a:spcPts val="600"/>
               </a:spcAft>
@@ -5847,7 +5847,7 @@
             </a:lvl1pPr>
           </a:lstStyle>
           <a:p>
-            <a:pPr algn="r"/>
+            <a:pPr eaLnBrk="0" algn="r"/>
             <a:fld id="{F7021451-1387-4CA6-816F-3879F97B5CBC}" type="slidenum">
               <a:rPr b="0" lang="en-US"/>
               <a:t>3</a:t>
@@ -5904,7 +5904,7 @@
           <a:bodyPr wrap="square" lIns="0" tIns="0" rIns="0" bIns="0" rtlCol="0" anchor="ctr"/>
           <a:lstStyle/>
           <a:p>
-            <a:pPr algn="l" indent="0" marL="0">
+            <a:pPr eaLnBrk="0" algn="l" indent="0" marL="0">
               <a:buNone/>
             </a:pPr>
             <a:r>
@@ -5943,7 +5943,7 @@
           <a:bodyPr wrap="square" lIns="0" tIns="0" rIns="0" bIns="0" rtlCol="0" anchor="ctr"/>
           <a:lstStyle/>
           <a:p>
-            <a:pPr algn="l" indent="0" marL="0">
+            <a:pPr eaLnBrk="0" algn="l" indent="0" marL="0">
               <a:buNone/>
             </a:pPr>
             <a:r>
@@ -5990,7 +5990,7 @@
           <a:bodyPr wrap="square" lIns="76200" tIns="50800" rIns="76200" bIns="50800" rtlCol="0" anchor="ctr"/>
           <a:lstStyle/>
           <a:p>
-            <a:pPr algn="ctr" indent="0" marL="0">
+            <a:pPr eaLnBrk="0" algn="ctr" indent="0" marL="0">
               <a:buNone/>
             </a:pPr>
             <a:r>
@@ -6037,7 +6037,7 @@
           <a:bodyPr wrap="square" lIns="76200" tIns="50800" rIns="76200" bIns="50800" rtlCol="0" anchor="ctr"/>
           <a:lstStyle/>
           <a:p>
-            <a:pPr algn="ctr" indent="0" marL="0">
+            <a:pPr eaLnBrk="0" algn="ctr" indent="0" marL="0">
               <a:buNone/>
             </a:pPr>
             <a:r>
@@ -6084,7 +6084,7 @@
           <a:bodyPr wrap="square" lIns="76200" tIns="50800" rIns="76200" bIns="50800" rtlCol="0" anchor="ctr"/>
           <a:lstStyle/>
           <a:p>
-            <a:pPr algn="ctr" indent="0" marL="0">
+            <a:pPr eaLnBrk="0" algn="ctr" indent="0" marL="0">
               <a:buNone/>
             </a:pPr>
             <a:r>
@@ -6131,7 +6131,7 @@
           <a:bodyPr wrap="square" lIns="76200" tIns="50800" rIns="76200" bIns="50800" rtlCol="0" anchor="ctr"/>
           <a:lstStyle/>
           <a:p>
-            <a:pPr algn="ctr" indent="0" marL="0">
+            <a:pPr eaLnBrk="0" algn="ctr" indent="0" marL="0">
               <a:buNone/>
             </a:pPr>
             <a:r>
@@ -6178,7 +6178,7 @@
           <a:bodyPr wrap="square" lIns="76200" tIns="50800" rIns="76200" bIns="50800" rtlCol="0" anchor="ctr"/>
           <a:lstStyle/>
           <a:p>
-            <a:pPr algn="ctr" indent="0" marL="0">
+            <a:pPr eaLnBrk="0" algn="ctr" indent="0" marL="0">
               <a:buNone/>
             </a:pPr>
             <a:r>
@@ -6225,7 +6225,7 @@
           <a:bodyPr wrap="square" lIns="76200" tIns="50800" rIns="76200" bIns="50800" rtlCol="0" anchor="ctr"/>
           <a:lstStyle/>
           <a:p>
-            <a:pPr algn="ctr" indent="0" marL="0">
+            <a:pPr eaLnBrk="0" algn="ctr" indent="0" marL="0">
               <a:buNone/>
             </a:pPr>
             <a:r>
@@ -6272,7 +6272,7 @@
           <a:bodyPr wrap="square" lIns="76200" tIns="50800" rIns="76200" bIns="50800" rtlCol="0" anchor="ctr"/>
           <a:lstStyle/>
           <a:p>
-            <a:pPr algn="ctr" indent="0" marL="0">
+            <a:pPr eaLnBrk="0" algn="ctr" indent="0" marL="0">
               <a:buNone/>
             </a:pPr>
             <a:r>
@@ -6319,7 +6319,7 @@
           <a:bodyPr wrap="square" lIns="76200" tIns="50800" rIns="76200" bIns="50800" rtlCol="0" anchor="ctr"/>
           <a:lstStyle/>
           <a:p>
-            <a:pPr algn="ctr" indent="0" marL="0">
+            <a:pPr eaLnBrk="0" algn="ctr" indent="0" marL="0">
               <a:buNone/>
             </a:pPr>
             <a:r>
@@ -6376,7 +6376,7 @@
             </a:lvl1pPr>
           </a:lstStyle>
           <a:p>
-            <a:pPr algn="r"/>
+            <a:pPr eaLnBrk="0" algn="r"/>
             <a:fld id="{F7021451-1387-4CA6-816F-3879F97B5CBC}" type="slidenum">
               <a:rPr b="0" lang="en-US"/>
               <a:t>4</a:t>
@@ -6433,7 +6433,7 @@
           <a:bodyPr wrap="square" lIns="0" tIns="0" rIns="0" bIns="0" rtlCol="0" anchor="ctr"/>
           <a:lstStyle/>
           <a:p>
-            <a:pPr algn="l" indent="0" marL="0">
+            <a:pPr eaLnBrk="0" algn="l" indent="0" marL="0">
               <a:buNone/>
             </a:pPr>
             <a:r>
@@ -6499,7 +6499,7 @@
           <a:bodyPr wrap="square" lIns="0" tIns="0" rIns="0" bIns="0" rtlCol="0" anchor="ctr"/>
           <a:lstStyle/>
           <a:p>
-            <a:pPr indent="0" marL="0">
+            <a:pPr eaLnBrk="0" indent="0" marL="0">
               <a:spcAft>
                 <a:spcPts val="600"/>
               </a:spcAft>
@@ -6568,7 +6568,7 @@
           <a:bodyPr wrap="square" lIns="0" tIns="0" rIns="0" bIns="0" rtlCol="0" anchor="t"/>
           <a:lstStyle/>
           <a:p>
-            <a:pPr indent="0" marL="0">
+            <a:pPr eaLnBrk="0" algn="l" indent="0" marL="0">
               <a:lnSpc>
                 <a:spcPct val="105000"/>
               </a:lnSpc>
@@ -6631,7 +6631,7 @@
             </a:lvl1pPr>
           </a:lstStyle>
           <a:p>
-            <a:pPr algn="r"/>
+            <a:pPr eaLnBrk="0" algn="r"/>
             <a:fld id="{F7021451-1387-4CA6-816F-3879F97B5CBC}" type="slidenum">
               <a:rPr b="0" lang="en-US"/>
               <a:t>5</a:t>
@@ -6688,7 +6688,7 @@
           <a:bodyPr wrap="square" lIns="0" tIns="0" rIns="0" bIns="0" rtlCol="0" anchor="ctr"/>
           <a:lstStyle/>
           <a:p>
-            <a:pPr algn="l" indent="0" marL="0">
+            <a:pPr eaLnBrk="0" algn="l" indent="0" marL="0">
               <a:buNone/>
             </a:pPr>
             <a:r>
@@ -6754,7 +6754,7 @@
           <a:bodyPr wrap="square" lIns="0" tIns="0" rIns="0" bIns="0" rtlCol="0" anchor="ctr"/>
           <a:lstStyle/>
           <a:p>
-            <a:pPr indent="0" marL="0">
+            <a:pPr eaLnBrk="0" indent="0" marL="0">
               <a:spcAft>
                 <a:spcPts val="600"/>
               </a:spcAft>
@@ -6802,7 +6802,7 @@
           <a:bodyPr wrap="square" lIns="0" tIns="0" rIns="0" bIns="0" rtlCol="0" anchor="ctr"/>
           <a:lstStyle/>
           <a:p>
-            <a:pPr algn="ctr" indent="0" marL="0">
+            <a:pPr eaLnBrk="0" algn="ctr" indent="0" marL="0">
               <a:buNone/>
             </a:pPr>
             <a:r>
@@ -6841,7 +6841,7 @@
           <a:bodyPr wrap="square" lIns="0" tIns="0" rIns="0" bIns="0" rtlCol="0" anchor="t"/>
           <a:lstStyle/>
           <a:p>
-            <a:pPr algn="l" indent="0" marL="0">
+            <a:pPr eaLnBrk="0" algn="l" indent="0" marL="0">
               <a:buNone/>
             </a:pPr>
             <a:r>
@@ -6886,7 +6886,7 @@
           <a:bodyPr wrap="square" lIns="0" tIns="0" rIns="0" bIns="0" rtlCol="0" anchor="ctr"/>
           <a:lstStyle/>
           <a:p>
-            <a:pPr algn="ctr" indent="0" marL="0">
+            <a:pPr eaLnBrk="0" algn="ctr" indent="0" marL="0">
               <a:buNone/>
             </a:pPr>
             <a:r>
@@ -6925,7 +6925,7 @@
           <a:bodyPr wrap="square" lIns="0" tIns="0" rIns="0" bIns="0" rtlCol="0" anchor="t"/>
           <a:lstStyle/>
           <a:p>
-            <a:pPr algn="l" indent="0" marL="0">
+            <a:pPr eaLnBrk="0" algn="l" indent="0" marL="0">
               <a:buNone/>
             </a:pPr>
             <a:r>
@@ -6970,7 +6970,7 @@
           <a:bodyPr wrap="square" lIns="0" tIns="0" rIns="0" bIns="0" rtlCol="0" anchor="ctr"/>
           <a:lstStyle/>
           <a:p>
-            <a:pPr algn="ctr" indent="0" marL="0">
+            <a:pPr eaLnBrk="0" algn="ctr" indent="0" marL="0">
               <a:buNone/>
             </a:pPr>
             <a:r>
@@ -7009,7 +7009,7 @@
           <a:bodyPr wrap="square" lIns="0" tIns="0" rIns="0" bIns="0" rtlCol="0" anchor="t"/>
           <a:lstStyle/>
           <a:p>
-            <a:pPr algn="l" indent="0" marL="0">
+            <a:pPr eaLnBrk="0" algn="l" indent="0" marL="0">
               <a:buNone/>
             </a:pPr>
             <a:r>
@@ -7054,7 +7054,7 @@
           <a:bodyPr wrap="square" lIns="0" tIns="0" rIns="0" bIns="0" rtlCol="0" anchor="ctr"/>
           <a:lstStyle/>
           <a:p>
-            <a:pPr algn="ctr" indent="0" marL="0">
+            <a:pPr eaLnBrk="0" algn="ctr" indent="0" marL="0">
               <a:buNone/>
             </a:pPr>
             <a:r>
@@ -7093,7 +7093,7 @@
           <a:bodyPr wrap="square" lIns="0" tIns="0" rIns="0" bIns="0" rtlCol="0" anchor="t"/>
           <a:lstStyle/>
           <a:p>
-            <a:pPr algn="l" indent="0" marL="0">
+            <a:pPr eaLnBrk="0" algn="l" indent="0" marL="0">
               <a:buNone/>
             </a:pPr>
             <a:r>
@@ -7150,7 +7150,7 @@
             </a:lvl1pPr>
           </a:lstStyle>
           <a:p>
-            <a:pPr algn="r"/>
+            <a:pPr eaLnBrk="0" algn="r"/>
             <a:fld id="{F7021451-1387-4CA6-816F-3879F97B5CBC}" type="slidenum">
               <a:rPr b="0" lang="en-US"/>
               <a:t>6</a:t>
@@ -7207,7 +7207,7 @@
           <a:bodyPr wrap="square" lIns="0" tIns="0" rIns="0" bIns="0" rtlCol="0" anchor="ctr"/>
           <a:lstStyle/>
           <a:p>
-            <a:pPr algn="l" indent="0" marL="0">
+            <a:pPr eaLnBrk="0" algn="l" indent="0" marL="0">
               <a:buNone/>
             </a:pPr>
             <a:r>
@@ -7273,7 +7273,7 @@
           <a:bodyPr wrap="square" lIns="0" tIns="0" rIns="0" bIns="0" rtlCol="0" anchor="ctr"/>
           <a:lstStyle/>
           <a:p>
-            <a:pPr indent="0" marL="0">
+            <a:pPr eaLnBrk="0" indent="0" marL="0">
               <a:spcAft>
                 <a:spcPts val="600"/>
               </a:spcAft>
@@ -7342,7 +7342,7 @@
           <a:bodyPr wrap="square" lIns="0" tIns="0" rIns="0" bIns="0" rtlCol="0" anchor="t"/>
           <a:lstStyle/>
           <a:p>
-            <a:pPr indent="0" marL="0">
+            <a:pPr eaLnBrk="0" algn="l" indent="0" marL="0">
               <a:lnSpc>
                 <a:spcPct val="105000"/>
               </a:lnSpc>
@@ -7405,7 +7405,7 @@
             </a:lvl1pPr>
           </a:lstStyle>
           <a:p>
-            <a:pPr algn="r"/>
+            <a:pPr eaLnBrk="0" algn="r"/>
             <a:fld id="{F7021451-1387-4CA6-816F-3879F97B5CBC}" type="slidenum">
               <a:rPr b="0" lang="en-US"/>
               <a:t>7</a:t>
@@ -7462,7 +7462,7 @@
           <a:bodyPr wrap="square" lIns="0" tIns="0" rIns="0" bIns="0" rtlCol="0" anchor="ctr"/>
           <a:lstStyle/>
           <a:p>
-            <a:pPr algn="l" indent="0" marL="0">
+            <a:pPr eaLnBrk="0" algn="l" indent="0" marL="0">
               <a:buNone/>
             </a:pPr>
             <a:r>
@@ -7528,7 +7528,7 @@
           <a:bodyPr wrap="square" lIns="0" tIns="0" rIns="0" bIns="0" rtlCol="0" anchor="ctr"/>
           <a:lstStyle/>
           <a:p>
-            <a:pPr indent="0" marL="0">
+            <a:pPr eaLnBrk="0" indent="0" marL="0">
               <a:spcAft>
                 <a:spcPts val="600"/>
               </a:spcAft>
@@ -7597,7 +7597,7 @@
           <a:bodyPr wrap="square" lIns="0" tIns="0" rIns="0" bIns="0" rtlCol="0" anchor="ctr"/>
           <a:lstStyle/>
           <a:p>
-            <a:pPr indent="0" marL="0">
+            <a:pPr eaLnBrk="0" indent="0" marL="0">
               <a:spcAft>
                 <a:spcPts val="600"/>
               </a:spcAft>
@@ -7647,7 +7647,7 @@
           <a:bodyPr wrap="square" lIns="177800" tIns="0" rIns="177800" bIns="0" rtlCol="0" anchor="ctr"/>
           <a:lstStyle/>
           <a:p>
-            <a:pPr algn="l" indent="0" marL="0">
+            <a:pPr eaLnBrk="0" algn="l" indent="0" marL="0">
               <a:buNone/>
             </a:pPr>
             <a:r>
@@ -7686,7 +7686,7 @@
           <a:bodyPr wrap="square" lIns="0" tIns="0" rIns="0" bIns="0" rtlCol="0" anchor="t"/>
           <a:lstStyle/>
           <a:p>
-            <a:pPr algn="l" indent="0" marL="0">
+            <a:pPr eaLnBrk="0" algn="l" indent="0" marL="0">
               <a:buNone/>
             </a:pPr>
             <a:r>
@@ -7703,7 +7703,7 @@
             <a:endParaRPr lang="ko-KR" sz="3000" dirty="0"/>
           </a:p>
           <a:p>
-            <a:pPr algn="l" indent="0" marL="0">
+            <a:pPr eaLnBrk="0" algn="l" indent="0" marL="0">
               <a:buNone/>
             </a:pPr>
             <a:r>
@@ -7750,7 +7750,7 @@
           <a:bodyPr wrap="square" lIns="177800" tIns="0" rIns="177800" bIns="0" rtlCol="0" anchor="ctr"/>
           <a:lstStyle/>
           <a:p>
-            <a:pPr algn="l" indent="0" marL="0">
+            <a:pPr eaLnBrk="0" algn="l" indent="0" marL="0">
               <a:buNone/>
             </a:pPr>
             <a:r>
@@ -7789,7 +7789,7 @@
           <a:bodyPr wrap="square" lIns="0" tIns="0" rIns="0" bIns="0" rtlCol="0" anchor="t"/>
           <a:lstStyle/>
           <a:p>
-            <a:pPr algn="l" indent="0" marL="0">
+            <a:pPr eaLnBrk="0" algn="l" indent="0" marL="0">
               <a:buNone/>
             </a:pPr>
             <a:r>
@@ -7806,7 +7806,7 @@
             <a:endParaRPr lang="ko-KR" sz="3000" dirty="0"/>
           </a:p>
           <a:p>
-            <a:pPr algn="l" indent="0" marL="0">
+            <a:pPr eaLnBrk="0" algn="l" indent="0" marL="0">
               <a:buNone/>
             </a:pPr>
             <a:r>
@@ -7863,7 +7863,7 @@
             </a:lvl1pPr>
           </a:lstStyle>
           <a:p>
-            <a:pPr algn="r"/>
+            <a:pPr eaLnBrk="0" algn="r"/>
             <a:fld id="{F7021451-1387-4CA6-816F-3879F97B5CBC}" type="slidenum">
               <a:rPr b="0" lang="en-US"/>
               <a:t>8</a:t>
@@ -7920,7 +7920,7 @@
           <a:bodyPr wrap="square" lIns="0" tIns="0" rIns="0" bIns="0" rtlCol="0" anchor="ctr"/>
           <a:lstStyle/>
           <a:p>
-            <a:pPr algn="l" indent="0" marL="0">
+            <a:pPr eaLnBrk="0" algn="l" indent="0" marL="0">
               <a:buNone/>
             </a:pPr>
             <a:r>
@@ -7986,7 +7986,7 @@
           <a:bodyPr wrap="square" lIns="0" tIns="0" rIns="0" bIns="0" rtlCol="0" anchor="ctr"/>
           <a:lstStyle/>
           <a:p>
-            <a:pPr indent="0" marL="0">
+            <a:pPr eaLnBrk="0" indent="0" marL="0">
               <a:spcAft>
                 <a:spcPts val="600"/>
               </a:spcAft>
@@ -8055,7 +8055,7 @@
           <a:bodyPr wrap="square" lIns="0" tIns="0" rIns="0" bIns="0" rtlCol="0" anchor="t"/>
           <a:lstStyle/>
           <a:p>
-            <a:pPr indent="0" marL="0">
+            <a:pPr eaLnBrk="0" algn="l" indent="0" marL="0">
               <a:lnSpc>
                 <a:spcPct val="105000"/>
               </a:lnSpc>
@@ -8118,7 +8118,7 @@
             </a:lvl1pPr>
           </a:lstStyle>
           <a:p>
-            <a:pPr algn="r"/>
+            <a:pPr eaLnBrk="0" algn="r"/>
             <a:fld id="{F7021451-1387-4CA6-816F-3879F97B5CBC}" type="slidenum">
               <a:rPr b="0" lang="en-US"/>
               <a:t>9</a:t>

--- a/dist/초3/국어/문학과매체/초3_국어_문학과매체_01_인물의마음과까닭.pptx
+++ b/dist/초3/국어/문학과매체/초3_국어_문학과매체_01_인물의마음과까닭.pptx
@@ -119,13 +119,13 @@
   <p:extLst>
     <p:ext uri="{521415D9-36F7-43E2-AB2F-B90AF26B5E84}">
       <p14:sectionLst xmlns:p14="http://schemas.microsoft.com/office/powerpoint/2010/main">
-        <p14:section name="도입" id="{1e274e94-daf7-12ef-b197-ad053b452fe8}">
+        <p14:section name="도입" id="{6e3f00a4-f44d-517c-39e9-f2aedc14a975}">
           <p14:sldIdLst>
             <p14:sldId id="256"/>
             <p14:sldId id="257"/>
           </p14:sldIdLst>
         </p14:section>
-        <p14:section name="개념" id="{df2ef6ab-1e02-5ba8-8dd2-53701f5c460a}">
+        <p14:section name="개념" id="{87478e31-7c72-b648-9ca5-0369a4a97f8d}">
           <p14:sldIdLst>
             <p14:sldId id="258"/>
             <p14:sldId id="259"/>
@@ -133,25 +133,25 @@
             <p14:sldId id="261"/>
           </p14:sldIdLst>
         </p14:section>
-        <p14:section name="연습" id="{713f5f43-5c95-08bb-b81b-67d93c02e570}">
+        <p14:section name="연습" id="{98931a2b-c741-cae0-dddb-57fbc108dd48}">
           <p14:sldIdLst>
             <p14:sldId id="262"/>
             <p14:sldId id="263"/>
           </p14:sldIdLst>
         </p14:section>
-        <p14:section name="확인" id="{b1ef6408-98e8-289b-9b37-6d2d6ca351d8}">
+        <p14:section name="확인" id="{167bf547-d259-1c94-2e6a-ebd60feeaea8}">
           <p14:sldIdLst>
             <p14:sldId id="264"/>
             <p14:sldId id="265"/>
             <p14:sldId id="266"/>
           </p14:sldIdLst>
         </p14:section>
-        <p14:section name="정리" id="{ebdb8a2a-a0b1-108d-80db-687d0001bea8}">
+        <p14:section name="정리" id="{4b54eb7b-7fca-00af-2182-47cd87745a27}">
           <p14:sldIdLst>
             <p14:sldId id="267"/>
           </p14:sldIdLst>
         </p14:section>
-        <p14:section name="보충" id="{96cab223-a589-eea9-b13b-2bf55955da92}">
+        <p14:section name="보충" id="{5796e5cd-d23f-b32e-ac6b-43a392014419}">
           <p14:sldIdLst>
             <p14:sldId id="268"/>
           </p14:sldIdLst>
